--- a/templates/carousels/posts/2026-10-14-wed-graduate.pptx
+++ b/templates/carousels/posts/2026-10-14-wed-graduate.pptx
@@ -3893,7 +3893,7 @@
           <a:p>
             <a:pPr algn="ctr"/>
             <a:r>
-              <a:rPr sz="2250" b="1" i="0">
+              <a:rPr sz="3000" b="1" i="0">
                 <a:solidFill>
                   <a:srgbClr val="22371F"/>
                 </a:solidFill>
@@ -3905,7 +3905,7 @@
           <a:p>
             <a:pPr algn="ctr"/>
             <a:r>
-              <a:rPr sz="2250" b="1" i="0">
+              <a:rPr sz="3000" b="1" i="0">
                 <a:solidFill>
                   <a:srgbClr val="22371F"/>
                 </a:solidFill>
@@ -3969,7 +3969,7 @@
         <p:spPr>
           <a:xfrm>
             <a:off x="571500" y="571500"/>
-            <a:ext cx="6667500" cy="381000"/>
+            <a:ext cx="9144000" cy="381000"/>
           </a:xfrm>
           <a:prstGeom prst="rect">
             <a:avLst/>
@@ -3984,7 +3984,7 @@
           <a:p>
             <a:pPr algn="l"/>
             <a:r>
-              <a:rPr sz="2100" b="1" i="0">
+              <a:rPr sz="3000" b="1" i="0">
                 <a:solidFill>
                   <a:srgbClr val="DBE6A7"/>
                 </a:solidFill>
@@ -4003,8 +4003,8 @@
         </p:nvSpPr>
         <p:spPr>
           <a:xfrm>
-            <a:off x="571500" y="8858250"/>
-            <a:ext cx="9144000" cy="1809750"/>
+            <a:off x="571500" y="8572500"/>
+            <a:ext cx="9144000" cy="2381250"/>
           </a:xfrm>
           <a:prstGeom prst="rect">
             <a:avLst/>
@@ -4023,7 +4023,7 @@
               </a:lnSpc>
             </a:pPr>
             <a:r>
-              <a:rPr sz="4200" b="1" i="0">
+              <a:rPr sz="5700" b="1" i="0">
                 <a:solidFill>
                   <a:srgbClr val="FFFFFF"/>
                 </a:solidFill>
@@ -4039,7 +4039,7 @@
               </a:lnSpc>
             </a:pPr>
             <a:r>
-              <a:rPr sz="4200" b="1" i="0">
+              <a:rPr sz="5700" b="1" i="0">
                 <a:solidFill>
                   <a:srgbClr val="FFFFFF"/>
                 </a:solidFill>
@@ -4058,8 +4058,8 @@
         </p:nvSpPr>
         <p:spPr>
           <a:xfrm>
-            <a:off x="571500" y="10953750"/>
-            <a:ext cx="9144000" cy="762000"/>
+            <a:off x="571500" y="11334750"/>
+            <a:ext cx="9144000" cy="571500"/>
           </a:xfrm>
           <a:prstGeom prst="rect">
             <a:avLst/>
@@ -4074,13 +4074,13 @@
           <a:p>
             <a:pPr algn="l"/>
             <a:r>
-              <a:rPr sz="2550" b="0" i="1">
+              <a:rPr sz="3000" b="0" i="1">
                 <a:solidFill>
                   <a:srgbClr val="DBE6A7"/>
                 </a:solidFill>
                 <a:latin typeface="EB Garamond"/>
               </a:rPr>
-              <a:t>[COPY: Allison] One warm, proud line. Say what they are known for locally.</a:t>
+              <a:t>[COPY: Allison] One proud line about them.</a:t>
             </a:r>
           </a:p>
         </p:txBody>
@@ -4399,7 +4399,7 @@
           <a:p>
             <a:pPr algn="ctr"/>
             <a:r>
-              <a:rPr sz="2250" b="1" i="0">
+              <a:rPr sz="3000" b="1" i="0">
                 <a:solidFill>
                   <a:srgbClr val="22371F"/>
                 </a:solidFill>
@@ -4411,7 +4411,7 @@
           <a:p>
             <a:pPr algn="ctr"/>
             <a:r>
-              <a:rPr sz="2250" b="1" i="0">
+              <a:rPr sz="3000" b="1" i="0">
                 <a:solidFill>
                   <a:srgbClr val="22371F"/>
                 </a:solidFill>
@@ -4446,7 +4446,7 @@
           <a:p>
             <a:pPr algn="l"/>
             <a:r>
-              <a:rPr sz="2250" b="1" i="0">
+              <a:rPr sz="3000" b="1" i="0">
                 <a:solidFill>
                   <a:srgbClr val="156826"/>
                 </a:solidFill>
@@ -4485,13 +4485,13 @@
               </a:lnSpc>
             </a:pPr>
             <a:r>
-              <a:rPr sz="3900" b="0" i="0">
+              <a:rPr sz="5700" b="0" i="0">
                 <a:solidFill>
                   <a:srgbClr val="22371F"/>
                 </a:solidFill>
                 <a:latin typeface="EB Garamond"/>
               </a:rPr>
-              <a:t>[COPY: Allison] One line. Plain and honest, e.g. what the ground was like the year they began.</a:t>
+              <a:t>[COPY: Allison] One line: how it began.</a:t>
             </a:r>
           </a:p>
         </p:txBody>
@@ -4520,7 +4520,7 @@
           <a:p>
             <a:pPr algn="l"/>
             <a:r>
-              <a:rPr sz="2100" b="1" i="0">
+              <a:rPr sz="3000" b="1" i="0">
                 <a:solidFill>
                   <a:srgbClr val="6A665C"/>
                 </a:solidFill>
@@ -4786,7 +4786,7 @@
         <p:spPr>
           <a:xfrm>
             <a:off x="571500" y="571500"/>
-            <a:ext cx="6667500" cy="381000"/>
+            <a:ext cx="9144000" cy="381000"/>
           </a:xfrm>
           <a:prstGeom prst="rect">
             <a:avLst/>
@@ -4801,7 +4801,7 @@
           <a:p>
             <a:pPr algn="l"/>
             <a:r>
-              <a:rPr sz="2100" b="1" i="0">
+              <a:rPr sz="3000" b="1" i="0">
                 <a:solidFill>
                   <a:srgbClr val="156826"/>
                 </a:solidFill>
@@ -4840,7 +4840,7 @@
               </a:lnSpc>
             </a:pPr>
             <a:r>
-              <a:rPr sz="4500" b="1" i="0">
+              <a:rPr sz="5700" b="1" i="0">
                 <a:solidFill>
                   <a:srgbClr val="22371F"/>
                 </a:solidFill>
@@ -4919,13 +4919,13 @@
           <a:p>
             <a:pPr algn="l"/>
             <a:r>
-              <a:rPr sz="3000" b="0" i="1">
+              <a:rPr sz="5700" b="0" i="1">
                 <a:solidFill>
                   <a:srgbClr val="333130"/>
                 </a:solidFill>
                 <a:latin typeface="EB Garamond"/>
               </a:rPr>
-              <a:t>[COPY: Allison] Optional second line: why, in the graduate's own words. Warm, not salesy.</a:t>
+              <a:t>[COPY: Allison] Optional: why, in their words.</a:t>
             </a:r>
           </a:p>
         </p:txBody>
@@ -4954,7 +4954,7 @@
           <a:p>
             <a:pPr algn="l"/>
             <a:r>
-              <a:rPr sz="2100" b="1" i="0">
+              <a:rPr sz="3000" b="1" i="0">
                 <a:solidFill>
                   <a:srgbClr val="6A665C"/>
                 </a:solidFill>
@@ -5220,7 +5220,7 @@
         <p:spPr>
           <a:xfrm>
             <a:off x="571500" y="571500"/>
-            <a:ext cx="6667500" cy="381000"/>
+            <a:ext cx="9144000" cy="381000"/>
           </a:xfrm>
           <a:prstGeom prst="rect">
             <a:avLst/>
@@ -5235,7 +5235,7 @@
           <a:p>
             <a:pPr algn="l"/>
             <a:r>
-              <a:rPr sz="2100" b="1" i="0">
+              <a:rPr sz="3000" b="1" i="0">
                 <a:solidFill>
                   <a:srgbClr val="DBE6A7"/>
                 </a:solidFill>
@@ -5270,13 +5270,13 @@
           <a:p>
             <a:pPr algn="l"/>
             <a:r>
-              <a:rPr sz="1950" b="1" i="0">
+              <a:rPr sz="3000" b="1" i="0">
                 <a:solidFill>
                   <a:srgbClr val="C9A227"/>
                 </a:solidFill>
                 <a:latin typeface="Montserrat"/>
               </a:rPr>
-              <a:t>[COPY: Allison] Big number, from the source below.</a:t>
+              <a:t>[COPY: Allison] Big number</a:t>
             </a:r>
           </a:p>
         </p:txBody>
@@ -5340,13 +5340,13 @@
           <a:p>
             <a:pPr algn="l"/>
             <a:r>
-              <a:rPr sz="3450" b="0" i="0">
+              <a:rPr sz="5700" b="0" i="0">
                 <a:solidFill>
                   <a:srgbClr val="FFFFFF"/>
                 </a:solidFill>
                 <a:latin typeface="EB Garamond"/>
               </a:rPr>
-              <a:t>[COPY: Allison] What the number measures, in one line, with units and the comparison (against what).</a:t>
+              <a:t>[COPY: Allison] What it measures, against what.</a:t>
             </a:r>
           </a:p>
         </p:txBody>
@@ -5375,13 +5375,13 @@
           <a:p>
             <a:pPr algn="l"/>
             <a:r>
-              <a:rPr sz="1950" b="0" i="0">
+              <a:rPr sz="3000" b="0" i="0">
                 <a:solidFill>
                   <a:srgbClr val="A7B097"/>
                 </a:solidFill>
                 <a:latin typeface="Source Sans 3"/>
               </a:rPr>
-              <a:t>[COPY: Allison] Source line: who measured it, where, which year. No source, no number.</a:t>
+              <a:t>[COPY: Allison] Source: who, where, year.</a:t>
             </a:r>
           </a:p>
         </p:txBody>
@@ -5410,7 +5410,7 @@
           <a:p>
             <a:pPr algn="l"/>
             <a:r>
-              <a:rPr sz="2100" b="1" i="0">
+              <a:rPr sz="3000" b="1" i="0">
                 <a:solidFill>
                   <a:srgbClr val="A7B097"/>
                 </a:solidFill>
@@ -5730,13 +5730,13 @@
               </a:lnSpc>
             </a:pPr>
             <a:r>
-              <a:rPr sz="4950" b="0" i="1">
+              <a:rPr sz="5700" b="0" i="1">
                 <a:solidFill>
                   <a:srgbClr val="22371F"/>
                 </a:solidFill>
                 <a:latin typeface="EB Garamond"/>
               </a:rPr>
-              <a:t>[COPY: Allison] Short quote from the graduate, three lines at most. Their voice, not ours.</a:t>
+              <a:t>[COPY: Allison] Short quote, their own words.</a:t>
             </a:r>
           </a:p>
         </p:txBody>
@@ -5765,7 +5765,7 @@
           <a:p>
             <a:pPr algn="l"/>
             <a:r>
-              <a:rPr sz="2550" b="1" i="0">
+              <a:rPr sz="3000" b="1" i="0">
                 <a:solidFill>
                   <a:srgbClr val="156826"/>
                 </a:solidFill>
@@ -5784,7 +5784,7 @@
         </p:nvSpPr>
         <p:spPr>
           <a:xfrm>
-            <a:off x="571500" y="9906000"/>
+            <a:off x="571500" y="10001250"/>
             <a:ext cx="9144000" cy="476250"/>
           </a:xfrm>
           <a:prstGeom prst="rect">
@@ -5800,7 +5800,7 @@
           <a:p>
             <a:pPr algn="l"/>
             <a:r>
-              <a:rPr sz="2550" b="1" i="0">
+              <a:rPr sz="3000" b="1" i="0">
                 <a:solidFill>
                   <a:srgbClr val="6A665C"/>
                 </a:solidFill>
